--- a/ConcurrencyTalk.pptx
+++ b/ConcurrencyTalk.pptx
@@ -6943,7 +6943,7 @@
           <p:nvPr/>
         </p:nvPicPr>
         <p:blipFill>
-          <a:blip r:embed="rId3"/>
+          <a:blip/>
           <a:stretch>
             <a:fillRect/>
           </a:stretch>
@@ -14396,19 +14396,10 @@
                 </a:solidFill>
                 <a:latin typeface="Arial"/>
               </a:rPr>
-              <a:t>, at </a:t>
-            </a:r>
-            <a:r>
-              <a:rPr lang="en-US" sz="4000" b="1">
-                <a:solidFill>
-                  <a:srgbClr val="FFFFFF"/>
-                </a:solidFill>
-                <a:latin typeface="Arial"/>
-              </a:rPr>
-              <a:t>times </a:t>
-            </a:r>
-            <a:r>
-              <a:rPr lang="en-US" sz="4000" b="1" i="0">
+              <a:t>, at times </a:t>
+            </a:r>
+            <a:r>
+              <a:rPr lang="en-US" sz="4000" b="1" i="0" dirty="0">
                 <a:solidFill>
                   <a:srgbClr val="FF9F0A"/>
                 </a:solidFill>
@@ -14417,7 +14408,7 @@
               <a:t>mis-implemented</a:t>
             </a:r>
             <a:r>
-              <a:rPr lang="en-US" sz="4000" b="1">
+              <a:rPr lang="en-US" sz="4000" b="1" dirty="0">
                 <a:solidFill>
                   <a:srgbClr val="FFFFFF"/>
                 </a:solidFill>
@@ -14426,7 +14417,7 @@
               <a:t>,</a:t>
             </a:r>
             <a:r>
-              <a:rPr lang="en-US" sz="4000" b="1" i="0">
+              <a:rPr lang="en-US" sz="4000" b="1" i="0" dirty="0">
                 <a:solidFill>
                   <a:srgbClr val="FF9F0A"/>
                 </a:solidFill>
@@ -36531,7 +36522,7 @@
         <p:spPr>
           <a:xfrm>
             <a:off x="1737360" y="1856231"/>
-            <a:ext cx="9509760" cy="365760"/>
+            <a:ext cx="9509760" cy="261610"/>
           </a:xfrm>
           <a:prstGeom prst="rect">
             <a:avLst/>
@@ -36544,15 +36535,50 @@
           </a:bodyPr>
           <a:lstStyle/>
           <a:p>
-            <a:pPr algn="l"/>
-            <a:r>
-              <a:rPr sz="1700" b="0" i="0">
-                <a:solidFill>
-                  <a:srgbClr val="FFFFFF"/>
-                </a:solidFill>
-                <a:latin typeface="Arial"/>
-              </a:rPr>
-              <a:t>Structured children never inherit isolation — and Task { } needs to see self</a:t>
+            <a:r>
+              <a:rPr lang="en-US" sz="1700" dirty="0">
+                <a:solidFill>
+                  <a:srgbClr val="FFFFFF"/>
+                </a:solidFill>
+                <a:latin typeface="Arial"/>
+              </a:rPr>
+              <a:t>Tasks from </a:t>
+            </a:r>
+            <a:r>
+              <a:rPr lang="en-US" sz="1700" b="1" dirty="0">
+                <a:solidFill>
+                  <a:srgbClr val="FFFFFF"/>
+                </a:solidFill>
+                <a:latin typeface="Courier New"/>
+              </a:rPr>
+              <a:t>async let </a:t>
+            </a:r>
+            <a:r>
+              <a:rPr sz="1700" b="0" i="0" dirty="0">
+                <a:solidFill>
+                  <a:srgbClr val="FFFFFF"/>
+                </a:solidFill>
+                <a:latin typeface="Arial"/>
+              </a:rPr>
+              <a:t>never inherit isolatio</a:t>
+            </a:r>
+            <a:r>
+              <a:rPr lang="en-US" sz="1700" b="0" i="0" dirty="0">
+                <a:solidFill>
+                  <a:srgbClr val="FFFFFF"/>
+                </a:solidFill>
+                <a:latin typeface="Arial"/>
+              </a:rPr>
+              <a:t>n.</a:t>
+            </a:r>
+            <a:r>
+              <a:rPr sz="1700" b="0" i="0" dirty="0">
+                <a:solidFill>
+                  <a:srgbClr val="FFFFFF"/>
+                </a:solidFill>
+                <a:latin typeface="Arial"/>
+              </a:rPr>
+              <a:t> </a:t>
             </a:r>
           </a:p>
         </p:txBody>
@@ -36601,7 +36627,7 @@
         <p:spPr>
           <a:xfrm>
             <a:off x="1737360" y="2569464"/>
-            <a:ext cx="9509760" cy="365760"/>
+            <a:ext cx="9509760" cy="261610"/>
           </a:xfrm>
           <a:prstGeom prst="rect">
             <a:avLst/>
@@ -36616,14 +36642,29 @@
           <a:p>
             <a:pPr algn="l"/>
             <a:r>
-              <a:rPr sz="1700" b="0" i="0">
-                <a:solidFill>
-                  <a:srgbClr val="FFFFFF"/>
-                </a:solidFill>
-                <a:latin typeface="Arial"/>
-              </a:rPr>
-              <a:t>Creation order is start order — explicit isolation only, and only until the first hop</a:t>
-            </a:r>
+              <a:rPr lang="en-US" sz="1700" dirty="0">
+                <a:solidFill>
+                  <a:srgbClr val="FFFFFF"/>
+                </a:solidFill>
+                <a:latin typeface="Arial"/>
+              </a:rPr>
+              <a:t>For isolated Tasks, </a:t>
+            </a:r>
+            <a:r>
+              <a:rPr lang="en-US" sz="1700" b="0" i="0" dirty="0">
+                <a:solidFill>
+                  <a:srgbClr val="FFFFFF"/>
+                </a:solidFill>
+                <a:latin typeface="Arial"/>
+              </a:rPr>
+              <a:t>creation order is NOT runtime order in Swift 5, but it is in Swift 6.</a:t>
+            </a:r>
+            <a:endParaRPr sz="1700" b="0" i="0" dirty="0">
+              <a:solidFill>
+                <a:srgbClr val="FFFFFF"/>
+              </a:solidFill>
+              <a:latin typeface="Arial"/>
+            </a:endParaRPr>
           </a:p>
         </p:txBody>
       </p:sp>
@@ -36671,7 +36712,7 @@
         <p:spPr>
           <a:xfrm>
             <a:off x="1737360" y="3282696"/>
-            <a:ext cx="9509760" cy="365760"/>
+            <a:ext cx="9509760" cy="261610"/>
           </a:xfrm>
           <a:prstGeom prst="rect">
             <a:avLst/>
@@ -36686,13 +36727,76 @@
           <a:p>
             <a:pPr algn="l"/>
             <a:r>
-              <a:rPr sz="1700" b="0" i="0">
-                <a:solidFill>
-                  <a:srgbClr val="FFFFFF"/>
-                </a:solidFill>
-                <a:latin typeface="Arial"/>
-              </a:rPr>
-              <a:t>6.2: nonisolated async runs on the caller — @concurrent opts out</a:t>
+              <a:rPr lang="en-US" sz="1700" b="0" i="0" dirty="0">
+                <a:solidFill>
+                  <a:srgbClr val="FFFFFF"/>
+                </a:solidFill>
+                <a:latin typeface="Arial"/>
+              </a:rPr>
+              <a:t>In Swift </a:t>
+            </a:r>
+            <a:r>
+              <a:rPr sz="1700" b="0" i="0" dirty="0">
+                <a:solidFill>
+                  <a:srgbClr val="FFFFFF"/>
+                </a:solidFill>
+                <a:latin typeface="Arial"/>
+              </a:rPr>
+              <a:t>6.2: </a:t>
+            </a:r>
+            <a:r>
+              <a:rPr sz="1700" b="0" i="0" dirty="0" err="1">
+                <a:solidFill>
+                  <a:srgbClr val="FFFFFF"/>
+                </a:solidFill>
+                <a:latin typeface="Arial"/>
+              </a:rPr>
+              <a:t>nonisolated</a:t>
+            </a:r>
+            <a:r>
+              <a:rPr sz="1700" b="0" i="0" dirty="0">
+                <a:solidFill>
+                  <a:srgbClr val="FFFFFF"/>
+                </a:solidFill>
+                <a:latin typeface="Arial"/>
+              </a:rPr>
+              <a:t> async </a:t>
+            </a:r>
+            <a:r>
+              <a:rPr lang="en-US" sz="1700" dirty="0">
+                <a:solidFill>
+                  <a:srgbClr val="FFFFFF"/>
+                </a:solidFill>
+                <a:latin typeface="Arial"/>
+              </a:rPr>
+              <a:t>methods </a:t>
+            </a:r>
+            <a:r>
+              <a:rPr sz="1700" b="0" i="0" dirty="0">
+                <a:solidFill>
+                  <a:srgbClr val="FFFFFF"/>
+                </a:solidFill>
+                <a:latin typeface="Arial"/>
+              </a:rPr>
+              <a:t>runs on the caller</a:t>
+            </a:r>
+            <a:r>
+              <a:rPr lang="en-US" sz="1700" dirty="0">
+                <a:solidFill>
+                  <a:srgbClr val="FFFFFF"/>
+                </a:solidFill>
+                <a:latin typeface="Arial"/>
+              </a:rPr>
+              <a:t>’s isolation </a:t>
+            </a:r>
+            <a:r>
+              <a:rPr sz="1700" b="0" i="0" dirty="0">
+                <a:solidFill>
+                  <a:srgbClr val="FFFFFF"/>
+                </a:solidFill>
+                <a:latin typeface="Arial"/>
+              </a:rPr>
+              <a:t>— @concurrent opts out</a:t>
             </a:r>
           </a:p>
         </p:txBody>
@@ -36756,7 +36860,7 @@
           <a:p>
             <a:pPr algn="l"/>
             <a:r>
-              <a:rPr sz="1700" b="0" i="0">
+              <a:rPr sz="1700" b="0" i="0" dirty="0">
                 <a:solidFill>
                   <a:srgbClr val="FFFFFF"/>
                 </a:solidFill>
@@ -36811,7 +36915,7 @@
         <p:spPr>
           <a:xfrm>
             <a:off x="1737360" y="4709160"/>
-            <a:ext cx="9509760" cy="365760"/>
+            <a:ext cx="9509760" cy="261610"/>
           </a:xfrm>
           <a:prstGeom prst="rect">
             <a:avLst/>
@@ -36824,16 +36928,57 @@
           </a:bodyPr>
           <a:lstStyle/>
           <a:p>
-            <a:pPr algn="l"/>
-            <a:r>
-              <a:rPr sz="1700" b="0" i="0">
-                <a:solidFill>
-                  <a:srgbClr val="FFFFFF"/>
-                </a:solidFill>
-                <a:latin typeface="Arial"/>
-              </a:rPr>
-              <a:t>Group bodies that return without next() discard child errors</a:t>
-            </a:r>
+            <a:r>
+              <a:rPr sz="1700" b="0" i="0" dirty="0">
+                <a:solidFill>
+                  <a:srgbClr val="FFFFFF"/>
+                </a:solidFill>
+                <a:latin typeface="Arial"/>
+              </a:rPr>
+              <a:t>Group bodies that return without </a:t>
+            </a:r>
+            <a:r>
+              <a:rPr lang="en-US" sz="1700" b="0" i="0" dirty="0">
+                <a:solidFill>
+                  <a:srgbClr val="FFFFFF"/>
+                </a:solidFill>
+                <a:latin typeface="Arial"/>
+              </a:rPr>
+              <a:t>a </a:t>
+            </a:r>
+            <a:r>
+              <a:rPr lang="en-US" sz="1700" b="1" dirty="0">
+                <a:solidFill>
+                  <a:srgbClr val="FFFFFF"/>
+                </a:solidFill>
+                <a:latin typeface="Courier New"/>
+              </a:rPr>
+              <a:t>next()</a:t>
+            </a:r>
+            <a:r>
+              <a:rPr sz="1700" b="0" i="0" dirty="0">
+                <a:solidFill>
+                  <a:srgbClr val="FFFFFF"/>
+                </a:solidFill>
+                <a:latin typeface="Arial"/>
+              </a:rPr>
+              <a:t>discard child errors</a:t>
+            </a:r>
+            <a:r>
+              <a:rPr lang="en-US" sz="1700" b="0" i="0" dirty="0">
+                <a:solidFill>
+                  <a:srgbClr val="FFFFFF"/>
+                </a:solidFill>
+                <a:latin typeface="Arial"/>
+              </a:rPr>
+              <a:t> – contrary to original proposal</a:t>
+            </a:r>
+            <a:endParaRPr sz="1700" b="0" i="0" dirty="0">
+              <a:solidFill>
+                <a:srgbClr val="FFFFFF"/>
+              </a:solidFill>
+              <a:latin typeface="Arial"/>
+            </a:endParaRPr>
           </a:p>
         </p:txBody>
       </p:sp>
@@ -36881,7 +37026,7 @@
         <p:spPr>
           <a:xfrm>
             <a:off x="1737360" y="5422392"/>
-            <a:ext cx="9509760" cy="365760"/>
+            <a:ext cx="9509760" cy="261610"/>
           </a:xfrm>
           <a:prstGeom prst="rect">
             <a:avLst/>
@@ -36896,14 +37041,65 @@
           <a:p>
             <a:pPr algn="l"/>
             <a:r>
-              <a:rPr sz="1700" b="0" i="0">
-                <a:solidFill>
-                  <a:srgbClr val="FFFFFF"/>
-                </a:solidFill>
-                <a:latin typeface="Arial"/>
-              </a:rPr>
-              <a:t>Framework callbacks don't read your isolation — build the closure where it runs</a:t>
-            </a:r>
+              <a:rPr lang="en-US" sz="1700" b="0" i="0" dirty="0">
+                <a:solidFill>
+                  <a:srgbClr val="FFFFFF"/>
+                </a:solidFill>
+                <a:latin typeface="Arial"/>
+              </a:rPr>
+              <a:t>Legacy code frameworks </a:t>
+            </a:r>
+            <a:r>
+              <a:rPr sz="1700" b="0" i="0" dirty="0">
+                <a:solidFill>
+                  <a:srgbClr val="FFFFFF"/>
+                </a:solidFill>
+                <a:latin typeface="Arial"/>
+              </a:rPr>
+              <a:t>don't read your isolation — </a:t>
+            </a:r>
+            <a:r>
+              <a:rPr lang="en-US" sz="1700" b="0" i="0" dirty="0">
+                <a:solidFill>
+                  <a:srgbClr val="FFFFFF"/>
+                </a:solidFill>
+                <a:latin typeface="Arial"/>
+              </a:rPr>
+              <a:t>re</a:t>
+            </a:r>
+            <a:r>
+              <a:rPr sz="1700" b="0" i="0" dirty="0">
+                <a:solidFill>
+                  <a:srgbClr val="FFFFFF"/>
+                </a:solidFill>
+                <a:latin typeface="Arial"/>
+              </a:rPr>
+              <a:t>build the closure </a:t>
+            </a:r>
+            <a:r>
+              <a:rPr lang="en-US" sz="1700" b="0" i="0" dirty="0">
+                <a:solidFill>
+                  <a:srgbClr val="FFFFFF"/>
+                </a:solidFill>
+                <a:latin typeface="Arial"/>
+              </a:rPr>
+              <a:t>for </a:t>
+            </a:r>
+            <a:r>
+              <a:rPr lang="en-US" sz="1700" b="0" i="0">
+                <a:solidFill>
+                  <a:srgbClr val="FFFFFF"/>
+                </a:solidFill>
+                <a:latin typeface="Arial"/>
+              </a:rPr>
+              <a:t>the isolation it runs in</a:t>
+            </a:r>
+            <a:endParaRPr sz="1700" b="0" i="0" dirty="0">
+              <a:solidFill>
+                <a:srgbClr val="FFFFFF"/>
+              </a:solidFill>
+              <a:latin typeface="Arial"/>
+            </a:endParaRPr>
           </a:p>
         </p:txBody>
       </p:sp>
@@ -41953,7 +42149,7 @@
           <a:p>
             <a:pPr algn="l"/>
             <a:r>
-              <a:rPr sz="1700" b="1" i="0">
+              <a:rPr sz="1700" b="1" i="0" dirty="0">
                 <a:solidFill>
                   <a:srgbClr val="FFFFFF"/>
                 </a:solidFill>
